--- a/docs/pitch-deck/realtime-events-ai-triggers.pptx
+++ b/docs/pitch-deck/realtime-events-ai-triggers.pptx
@@ -1898,7 +1898,7 @@
               <a:buNone/>
             </a:pPr>
             <a:r>
-              <a:rPr lang="en-US" sz="3000" b="1" dirty="0">
+              <a:rPr lang="en-US" sz="2800" b="1" dirty="0">
                 <a:solidFill>
                   <a:srgbClr val="F1F5F9"/>
                 </a:solidFill>
@@ -1906,9 +1906,9 @@
                 <a:ea typeface="Arial" pitchFamily="34" charset="-122"/>
                 <a:cs typeface="Arial" pitchFamily="34" charset="-120"/>
               </a:rPr>
-              <a:t>Customers can stream events. They can't act on them in the moment.</a:t>
-            </a:r>
-            <a:endParaRPr lang="en-US" sz="3000" dirty="0"/>
+              <a:t>Customers stream events. They can't reason over the last few minutes of them.</a:t>
+            </a:r>
+            <a:endParaRPr lang="en-US" sz="2800" dirty="0"/>
           </a:p>
         </p:txBody>
       </p:sp>
@@ -1920,8 +1920,8 @@
         </p:nvSpPr>
         <p:spPr>
           <a:xfrm>
-            <a:off x="548640" y="1965960"/>
-            <a:ext cx="11155680" cy="640080"/>
+            <a:off x="548640" y="1874520"/>
+            <a:ext cx="11155680" cy="777240"/>
           </a:xfrm>
           <a:prstGeom prst="rect">
             <a:avLst/>
@@ -1945,7 +1945,7 @@
                 <a:ea typeface="Arial" pitchFamily="34" charset="-122"/>
                 <a:cs typeface="Arial" pitchFamily="34" charset="-120"/>
               </a:rPr>
-              <a:t>Event pipelines and warehouse audiences both exist — but the action layer in between is hand-wired with cron jobs, BigQuery dashboards, and Slack scripts that age fast.</a:t>
+              <a:t>Real-time pipelines deliver events. Warehouse audiences segment customers over weeks. There's nothing in between that holds short-term memory of a session, watches for live patterns, and acts in seconds — so teams stitch it together with brittle scripts and miss the moment.</a:t>
             </a:r>
             <a:endParaRPr lang="en-US" sz="1400" dirty="0"/>
           </a:p>
@@ -2805,7 +2805,7 @@
                 <a:ea typeface="Arial" pitchFamily="34" charset="-122"/>
                 <a:cs typeface="Arial" pitchFamily="34" charset="-120"/>
               </a:rPr>
-              <a:t>Four moments worth catching. One engine catches them all.</a:t>
+              <a:t>Six moments worth catching. One engine catches them all.</a:t>
             </a:r>
             <a:endParaRPr lang="en-US" sz="3000" dirty="0"/>
           </a:p>
@@ -2819,8 +2819,8 @@
         </p:nvSpPr>
         <p:spPr>
           <a:xfrm>
-            <a:off x="548640" y="1783080"/>
-            <a:ext cx="5257800" cy="2194560"/>
+            <a:off x="502920" y="1783080"/>
+            <a:ext cx="3703320" cy="2240280"/>
           </a:xfrm>
           <a:prstGeom prst="rect">
             <a:avLst/>
@@ -2851,8 +2851,8 @@
         </p:nvSpPr>
         <p:spPr>
           <a:xfrm>
-            <a:off x="548640" y="1783080"/>
-            <a:ext cx="64008" cy="2194560"/>
+            <a:off x="502920" y="1783080"/>
+            <a:ext cx="64008" cy="2240280"/>
           </a:xfrm>
           <a:prstGeom prst="rect">
             <a:avLst/>
@@ -2884,8 +2884,8 @@
         </p:blipFill>
         <p:spPr>
           <a:xfrm>
-            <a:off x="822960" y="2057400"/>
-            <a:ext cx="457200" cy="457200"/>
+            <a:off x="731520" y="2011680"/>
+            <a:ext cx="384048" cy="384048"/>
           </a:xfrm>
           <a:prstGeom prst="rect">
             <a:avLst/>
@@ -2900,8 +2900,8 @@
         </p:nvSpPr>
         <p:spPr>
           <a:xfrm>
-            <a:off x="1463040" y="2057400"/>
-            <a:ext cx="4206240" cy="502920"/>
+            <a:off x="1280160" y="1947672"/>
+            <a:ext cx="2834640" cy="548640"/>
           </a:xfrm>
           <a:prstGeom prst="rect">
             <a:avLst/>
@@ -2917,7 +2917,7 @@
               <a:buNone/>
             </a:pPr>
             <a:r>
-              <a:rPr lang="en-US" sz="1600" b="1" dirty="0">
+              <a:rPr lang="en-US" sz="1400" b="1" dirty="0">
                 <a:solidFill>
                   <a:srgbClr val="F1F5F9"/>
                 </a:solidFill>
@@ -2925,9 +2925,9 @@
                 <a:ea typeface="Arial" pitchFamily="34" charset="-122"/>
                 <a:cs typeface="Arial" pitchFamily="34" charset="-120"/>
               </a:rPr>
-              <a:t>Win back anonymous high-intent visitors</a:t>
-            </a:r>
-            <a:endParaRPr lang="en-US" sz="1600" dirty="0"/>
+              <a:t>Capture anonymous high-intent</a:t>
+            </a:r>
+            <a:endParaRPr lang="en-US" sz="1400" dirty="0"/>
           </a:p>
         </p:txBody>
       </p:sp>
@@ -2939,8 +2939,8 @@
         </p:nvSpPr>
         <p:spPr>
           <a:xfrm>
-            <a:off x="822960" y="2651760"/>
-            <a:ext cx="4754880" cy="914400"/>
+            <a:off x="731520" y="2560320"/>
+            <a:ext cx="3337560" cy="1051560"/>
           </a:xfrm>
           <a:prstGeom prst="rect">
             <a:avLst/>
@@ -2956,7 +2956,7 @@
               <a:buNone/>
             </a:pPr>
             <a:r>
-              <a:rPr lang="en-US" sz="1200" dirty="0">
+              <a:rPr lang="en-US" sz="1100" dirty="0">
                 <a:solidFill>
                   <a:srgbClr val="CBD5E1"/>
                 </a:solidFill>
@@ -2964,9 +2964,9 @@
                 <a:ea typeface="Arial" pitchFamily="34" charset="-122"/>
                 <a:cs typeface="Arial" pitchFamily="34" charset="-120"/>
               </a:rPr>
-              <a:t>Visitor narrows filters, opens 3 listings, idles. We trigger an in-app capture banner + ping a standby agent on Slack — before they leave.</a:t>
-            </a:r>
-            <a:endParaRPr lang="en-US" sz="1200" dirty="0"/>
+              <a:t>Visitor narrows filters, opens 3 listings, idles. Fire an in-app banner offering a tour or chat — before they leave the site, while they're still on it.</a:t>
+            </a:r>
+            <a:endParaRPr lang="en-US" sz="1100" dirty="0"/>
           </a:p>
         </p:txBody>
       </p:sp>
@@ -2978,8 +2978,8 @@
         </p:nvSpPr>
         <p:spPr>
           <a:xfrm>
-            <a:off x="822960" y="3566160"/>
-            <a:ext cx="2743200" cy="292608"/>
+            <a:off x="731520" y="3657600"/>
+            <a:ext cx="2036826" cy="274320"/>
           </a:xfrm>
           <a:prstGeom prst="rect">
             <a:avLst/>
@@ -2995,7 +2995,7 @@
               <a:buNone/>
             </a:pPr>
             <a:r>
-              <a:rPr lang="en-US" sz="1200" b="1" dirty="0">
+              <a:rPr lang="en-US" sz="1100" b="1" dirty="0">
                 <a:solidFill>
                   <a:srgbClr val="FB7185"/>
                 </a:solidFill>
@@ -3003,9 +3003,9 @@
                 <a:ea typeface="Arial" pitchFamily="34" charset="-122"/>
                 <a:cs typeface="Arial" pitchFamily="34" charset="-120"/>
               </a:rPr>
-              <a:t>+38% capture rate</a:t>
-            </a:r>
-            <a:endParaRPr lang="en-US" sz="1200" dirty="0"/>
+              <a:t>In-app capture moment</a:t>
+            </a:r>
+            <a:endParaRPr lang="en-US" sz="1100" dirty="0"/>
           </a:p>
         </p:txBody>
       </p:sp>
@@ -3017,8 +3017,8 @@
         </p:nvSpPr>
         <p:spPr>
           <a:xfrm>
-            <a:off x="3566160" y="3566160"/>
-            <a:ext cx="2103120" cy="292608"/>
+            <a:off x="2676906" y="3657600"/>
+            <a:ext cx="1298448" cy="274320"/>
           </a:xfrm>
           <a:prstGeom prst="rect">
             <a:avLst/>
@@ -3034,7 +3034,7 @@
               <a:buNone/>
             </a:pPr>
             <a:r>
-              <a:rPr lang="en-US" sz="1100" i="1" dirty="0">
+              <a:rPr lang="en-US" sz="1000" i="1" dirty="0">
                 <a:solidFill>
                   <a:srgbClr val="CBD5E1"/>
                 </a:solidFill>
@@ -3044,7 +3044,7 @@
               </a:rPr>
               <a:t>→ Marketing pain</a:t>
             </a:r>
-            <a:endParaRPr lang="en-US" sz="1100" dirty="0"/>
+            <a:endParaRPr lang="en-US" sz="1000" dirty="0"/>
           </a:p>
         </p:txBody>
       </p:sp>
@@ -3056,8 +3056,8 @@
         </p:nvSpPr>
         <p:spPr>
           <a:xfrm>
-            <a:off x="6355080" y="1783080"/>
-            <a:ext cx="5257800" cy="2194560"/>
+            <a:off x="4297680" y="1783080"/>
+            <a:ext cx="3703320" cy="2240280"/>
           </a:xfrm>
           <a:prstGeom prst="rect">
             <a:avLst/>
@@ -3088,8 +3088,8 @@
         </p:nvSpPr>
         <p:spPr>
           <a:xfrm>
-            <a:off x="6355080" y="1783080"/>
-            <a:ext cx="64008" cy="2194560"/>
+            <a:off x="4297680" y="1783080"/>
+            <a:ext cx="64008" cy="2240280"/>
           </a:xfrm>
           <a:prstGeom prst="rect">
             <a:avLst/>
@@ -3121,8 +3121,8 @@
         </p:blipFill>
         <p:spPr>
           <a:xfrm>
-            <a:off x="6629400" y="2057400"/>
-            <a:ext cx="457200" cy="457200"/>
+            <a:off x="4526280" y="2011680"/>
+            <a:ext cx="384048" cy="384048"/>
           </a:xfrm>
           <a:prstGeom prst="rect">
             <a:avLst/>
@@ -3137,8 +3137,8 @@
         </p:nvSpPr>
         <p:spPr>
           <a:xfrm>
-            <a:off x="7269480" y="2057400"/>
-            <a:ext cx="4206240" cy="502920"/>
+            <a:off x="5074920" y="1947672"/>
+            <a:ext cx="2834640" cy="548640"/>
           </a:xfrm>
           <a:prstGeom prst="rect">
             <a:avLst/>
@@ -3154,7 +3154,7 @@
               <a:buNone/>
             </a:pPr>
             <a:r>
-              <a:rPr lang="en-US" sz="1600" b="1" dirty="0">
+              <a:rPr lang="en-US" sz="1400" b="1" dirty="0">
                 <a:solidFill>
                   <a:srgbClr val="F1F5F9"/>
                 </a:solidFill>
@@ -3162,9 +3162,9 @@
                 <a:ea typeface="Arial" pitchFamily="34" charset="-122"/>
                 <a:cs typeface="Arial" pitchFamily="34" charset="-120"/>
               </a:rPr>
-              <a:t>Alert your team to known engagement</a:t>
-            </a:r>
-            <a:endParaRPr lang="en-US" sz="1600" dirty="0"/>
+              <a:t>Alert sales / CS on known engagement</a:t>
+            </a:r>
+            <a:endParaRPr lang="en-US" sz="1400" dirty="0"/>
           </a:p>
         </p:txBody>
       </p:sp>
@@ -3176,8 +3176,8 @@
         </p:nvSpPr>
         <p:spPr>
           <a:xfrm>
-            <a:off x="6629400" y="2651760"/>
-            <a:ext cx="4754880" cy="914400"/>
+            <a:off x="4526280" y="2560320"/>
+            <a:ext cx="3337560" cy="1051560"/>
           </a:xfrm>
           <a:prstGeom prst="rect">
             <a:avLst/>
@@ -3193,7 +3193,7 @@
               <a:buNone/>
             </a:pPr>
             <a:r>
-              <a:rPr lang="en-US" sz="1200" dirty="0">
+              <a:rPr lang="en-US" sz="1100" dirty="0">
                 <a:solidFill>
                   <a:srgbClr val="CBD5E1"/>
                 </a:solidFill>
@@ -3201,9 +3201,9 @@
                 <a:ea typeface="Arial" pitchFamily="34" charset="-122"/>
                 <a:cs typeface="Arial" pitchFamily="34" charset="-120"/>
               </a:rPr>
-              <a:t>Logged-in customer revisits their target suburb. Slack to the right realtor with full context: name, income tier, propensity, the listing they dwelled on.</a:t>
-            </a:r>
-            <a:endParaRPr lang="en-US" sz="1200" dirty="0"/>
+              <a:t>Logged-in customer revisits pricing. Slack the right account owner with full context: name, ARR, prior interactions, the page they're dwelling on.</a:t>
+            </a:r>
+            <a:endParaRPr lang="en-US" sz="1100" dirty="0"/>
           </a:p>
         </p:txBody>
       </p:sp>
@@ -3215,8 +3215,8 @@
         </p:nvSpPr>
         <p:spPr>
           <a:xfrm>
-            <a:off x="6629400" y="3566160"/>
-            <a:ext cx="2743200" cy="292608"/>
+            <a:off x="4526280" y="3657600"/>
+            <a:ext cx="2036826" cy="274320"/>
           </a:xfrm>
           <a:prstGeom prst="rect">
             <a:avLst/>
@@ -3232,7 +3232,7 @@
               <a:buNone/>
             </a:pPr>
             <a:r>
-              <a:rPr lang="en-US" sz="1200" b="1" dirty="0">
+              <a:rPr lang="en-US" sz="1100" b="1" dirty="0">
                 <a:solidFill>
                   <a:srgbClr val="F59E0B"/>
                 </a:solidFill>
@@ -3240,9 +3240,9 @@
                 <a:ea typeface="Arial" pitchFamily="34" charset="-122"/>
                 <a:cs typeface="Arial" pitchFamily="34" charset="-120"/>
               </a:rPr>
-              <a:t>6s response time</a:t>
-            </a:r>
-            <a:endParaRPr lang="en-US" sz="1200" dirty="0"/>
+              <a:t>Real-time human handoff</a:t>
+            </a:r>
+            <a:endParaRPr lang="en-US" sz="1100" dirty="0"/>
           </a:p>
         </p:txBody>
       </p:sp>
@@ -3254,8 +3254,8 @@
         </p:nvSpPr>
         <p:spPr>
           <a:xfrm>
-            <a:off x="9372600" y="3566160"/>
-            <a:ext cx="2103120" cy="292608"/>
+            <a:off x="6471666" y="3657600"/>
+            <a:ext cx="1298448" cy="274320"/>
           </a:xfrm>
           <a:prstGeom prst="rect">
             <a:avLst/>
@@ -3271,7 +3271,7 @@
               <a:buNone/>
             </a:pPr>
             <a:r>
-              <a:rPr lang="en-US" sz="1100" i="1" dirty="0">
+              <a:rPr lang="en-US" sz="1000" i="1" dirty="0">
                 <a:solidFill>
                   <a:srgbClr val="CBD5E1"/>
                 </a:solidFill>
@@ -3281,7 +3281,7 @@
               </a:rPr>
               <a:t>→ Customer Success pain</a:t>
             </a:r>
-            <a:endParaRPr lang="en-US" sz="1100" dirty="0"/>
+            <a:endParaRPr lang="en-US" sz="1000" dirty="0"/>
           </a:p>
         </p:txBody>
       </p:sp>
@@ -3293,8 +3293,8 @@
         </p:nvSpPr>
         <p:spPr>
           <a:xfrm>
-            <a:off x="548640" y="4114800"/>
-            <a:ext cx="5257800" cy="2194560"/>
+            <a:off x="8092440" y="1783080"/>
+            <a:ext cx="3703320" cy="2240280"/>
           </a:xfrm>
           <a:prstGeom prst="rect">
             <a:avLst/>
@@ -3325,8 +3325,8 @@
         </p:nvSpPr>
         <p:spPr>
           <a:xfrm>
-            <a:off x="548640" y="4114800"/>
-            <a:ext cx="64008" cy="2194560"/>
+            <a:off x="8092440" y="1783080"/>
+            <a:ext cx="64008" cy="2240280"/>
           </a:xfrm>
           <a:prstGeom prst="rect">
             <a:avLst/>
@@ -3358,8 +3358,8 @@
         </p:blipFill>
         <p:spPr>
           <a:xfrm>
-            <a:off x="822960" y="4389120"/>
-            <a:ext cx="457200" cy="457200"/>
+            <a:off x="8321040" y="2011680"/>
+            <a:ext cx="384048" cy="384048"/>
           </a:xfrm>
           <a:prstGeom prst="rect">
             <a:avLst/>
@@ -3374,8 +3374,8 @@
         </p:nvSpPr>
         <p:spPr>
           <a:xfrm>
-            <a:off x="1463040" y="4389120"/>
-            <a:ext cx="4206240" cy="502920"/>
+            <a:off x="8869680" y="1947672"/>
+            <a:ext cx="2834640" cy="548640"/>
           </a:xfrm>
           <a:prstGeom prst="rect">
             <a:avLst/>
@@ -3391,7 +3391,7 @@
               <a:buNone/>
             </a:pPr>
             <a:r>
-              <a:rPr lang="en-US" sz="1600" b="1" dirty="0">
+              <a:rPr lang="en-US" sz="1400" b="1" dirty="0">
                 <a:solidFill>
                   <a:srgbClr val="F1F5F9"/>
                 </a:solidFill>
@@ -3401,7 +3401,7 @@
               </a:rPr>
               <a:t>Rescue stuck onboarding errors</a:t>
             </a:r>
-            <a:endParaRPr lang="en-US" sz="1600" dirty="0"/>
+            <a:endParaRPr lang="en-US" sz="1400" dirty="0"/>
           </a:p>
         </p:txBody>
       </p:sp>
@@ -3413,8 +3413,8 @@
         </p:nvSpPr>
         <p:spPr>
           <a:xfrm>
-            <a:off x="822960" y="4983480"/>
-            <a:ext cx="4754880" cy="914400"/>
+            <a:off x="8321040" y="2560320"/>
+            <a:ext cx="3337560" cy="1051560"/>
           </a:xfrm>
           <a:prstGeom prst="rect">
             <a:avLst/>
@@ -3430,7 +3430,7 @@
               <a:buNone/>
             </a:pPr>
             <a:r>
-              <a:rPr lang="en-US" sz="1200" dirty="0">
+              <a:rPr lang="en-US" sz="1100" dirty="0">
                 <a:solidFill>
                   <a:srgbClr val="CBD5E1"/>
                 </a:solidFill>
@@ -3438,9 +3438,9 @@
                 <a:ea typeface="Arial" pitchFamily="34" charset="-122"/>
                 <a:cs typeface="Arial" pitchFamily="34" charset="-120"/>
               </a:rPr>
-              <a:t>Setup error fires → personalized 3-step fix email referencing the exact error code, the destination type, and the customer's stack.</a:t>
-            </a:r>
-            <a:endParaRPr lang="en-US" sz="1200" dirty="0"/>
+              <a:t>Setup error fires. We send a personalized fix email referencing the exact error code, the destination type, and the customer's stack — not a generic FAQ.</a:t>
+            </a:r>
+            <a:endParaRPr lang="en-US" sz="1100" dirty="0"/>
           </a:p>
         </p:txBody>
       </p:sp>
@@ -3452,8 +3452,8 @@
         </p:nvSpPr>
         <p:spPr>
           <a:xfrm>
-            <a:off x="822960" y="5897880"/>
-            <a:ext cx="2743200" cy="292608"/>
+            <a:off x="8321040" y="3657600"/>
+            <a:ext cx="2036826" cy="274320"/>
           </a:xfrm>
           <a:prstGeom prst="rect">
             <a:avLst/>
@@ -3469,7 +3469,7 @@
               <a:buNone/>
             </a:pPr>
             <a:r>
-              <a:rPr lang="en-US" sz="1200" b="1" dirty="0">
+              <a:rPr lang="en-US" sz="1100" b="1" dirty="0">
                 <a:solidFill>
                   <a:srgbClr val="5EEAD4"/>
                 </a:solidFill>
@@ -3477,9 +3477,9 @@
                 <a:ea typeface="Arial" pitchFamily="34" charset="-122"/>
                 <a:cs typeface="Arial" pitchFamily="34" charset="-120"/>
               </a:rPr>
-              <a:t>+71% recovery rate</a:t>
-            </a:r>
-            <a:endParaRPr lang="en-US" sz="1200" dirty="0"/>
+              <a:t>Personalized per error</a:t>
+            </a:r>
+            <a:endParaRPr lang="en-US" sz="1100" dirty="0"/>
           </a:p>
         </p:txBody>
       </p:sp>
@@ -3491,8 +3491,8 @@
         </p:nvSpPr>
         <p:spPr>
           <a:xfrm>
-            <a:off x="3566160" y="5897880"/>
-            <a:ext cx="2103120" cy="292608"/>
+            <a:off x="10266426" y="3657600"/>
+            <a:ext cx="1298448" cy="274320"/>
           </a:xfrm>
           <a:prstGeom prst="rect">
             <a:avLst/>
@@ -3508,7 +3508,7 @@
               <a:buNone/>
             </a:pPr>
             <a:r>
-              <a:rPr lang="en-US" sz="1100" i="1" dirty="0">
+              <a:rPr lang="en-US" sz="1000" i="1" dirty="0">
                 <a:solidFill>
                   <a:srgbClr val="CBD5E1"/>
                 </a:solidFill>
@@ -3518,7 +3518,7 @@
               </a:rPr>
               <a:t>→ Onboarding pain</a:t>
             </a:r>
-            <a:endParaRPr lang="en-US" sz="1100" dirty="0"/>
+            <a:endParaRPr lang="en-US" sz="1000" dirty="0"/>
           </a:p>
         </p:txBody>
       </p:sp>
@@ -3530,8 +3530,8 @@
         </p:nvSpPr>
         <p:spPr>
           <a:xfrm>
-            <a:off x="6355080" y="4114800"/>
-            <a:ext cx="5257800" cy="2194560"/>
+            <a:off x="502920" y="4114800"/>
+            <a:ext cx="3703320" cy="2240280"/>
           </a:xfrm>
           <a:prstGeom prst="rect">
             <a:avLst/>
@@ -3562,8 +3562,8 @@
         </p:nvSpPr>
         <p:spPr>
           <a:xfrm>
-            <a:off x="6355080" y="4114800"/>
-            <a:ext cx="64008" cy="2194560"/>
+            <a:off x="502920" y="4114800"/>
+            <a:ext cx="64008" cy="2240280"/>
           </a:xfrm>
           <a:prstGeom prst="rect">
             <a:avLst/>
@@ -3595,8 +3595,8 @@
         </p:blipFill>
         <p:spPr>
           <a:xfrm>
-            <a:off x="6629400" y="4389120"/>
-            <a:ext cx="457200" cy="457200"/>
+            <a:off x="731520" y="4343400"/>
+            <a:ext cx="384048" cy="384048"/>
           </a:xfrm>
           <a:prstGeom prst="rect">
             <a:avLst/>
@@ -3611,8 +3611,8 @@
         </p:nvSpPr>
         <p:spPr>
           <a:xfrm>
-            <a:off x="7269480" y="4389120"/>
-            <a:ext cx="4206240" cy="502920"/>
+            <a:off x="1280160" y="4279392"/>
+            <a:ext cx="2834640" cy="548640"/>
           </a:xfrm>
           <a:prstGeom prst="rect">
             <a:avLst/>
@@ -3628,7 +3628,7 @@
               <a:buNone/>
             </a:pPr>
             <a:r>
-              <a:rPr lang="en-US" sz="1600" b="1" dirty="0">
+              <a:rPr lang="en-US" sz="1400" b="1" dirty="0">
                 <a:solidFill>
                   <a:srgbClr val="F1F5F9"/>
                 </a:solidFill>
@@ -3638,7 +3638,7 @@
               </a:rPr>
               <a:t>Re-engage stalled multi-step flows</a:t>
             </a:r>
-            <a:endParaRPr lang="en-US" sz="1600" dirty="0"/>
+            <a:endParaRPr lang="en-US" sz="1400" dirty="0"/>
           </a:p>
         </p:txBody>
       </p:sp>
@@ -3650,8 +3650,8 @@
         </p:nvSpPr>
         <p:spPr>
           <a:xfrm>
-            <a:off x="6629400" y="4983480"/>
-            <a:ext cx="4754880" cy="914400"/>
+            <a:off x="731520" y="4892040"/>
+            <a:ext cx="3337560" cy="1051560"/>
           </a:xfrm>
           <a:prstGeom prst="rect">
             <a:avLst/>
@@ -3667,7 +3667,7 @@
               <a:buNone/>
             </a:pPr>
             <a:r>
-              <a:rPr lang="en-US" sz="1200" dirty="0">
+              <a:rPr lang="en-US" sz="1100" dirty="0">
                 <a:solidFill>
                   <a:srgbClr val="CBD5E1"/>
                 </a:solidFill>
@@ -3677,7 +3677,7 @@
               </a:rPr>
               <a:t>Customer created a source but never connected a destination. After idle, an email referencing their progress and tech stack — not a generic nudge.</a:t>
             </a:r>
-            <a:endParaRPr lang="en-US" sz="1200" dirty="0"/>
+            <a:endParaRPr lang="en-US" sz="1100" dirty="0"/>
           </a:p>
         </p:txBody>
       </p:sp>
@@ -3689,8 +3689,8 @@
         </p:nvSpPr>
         <p:spPr>
           <a:xfrm>
-            <a:off x="6629400" y="5897880"/>
-            <a:ext cx="2743200" cy="292608"/>
+            <a:off x="731520" y="5989320"/>
+            <a:ext cx="2036826" cy="274320"/>
           </a:xfrm>
           <a:prstGeom prst="rect">
             <a:avLst/>
@@ -3706,7 +3706,7 @@
               <a:buNone/>
             </a:pPr>
             <a:r>
-              <a:rPr lang="en-US" sz="1200" b="1" dirty="0">
+              <a:rPr lang="en-US" sz="1100" b="1" dirty="0">
                 <a:solidFill>
                   <a:srgbClr val="5EEAD4"/>
                 </a:solidFill>
@@ -3714,9 +3714,9 @@
                 <a:ea typeface="Arial" pitchFamily="34" charset="-122"/>
                 <a:cs typeface="Arial" pitchFamily="34" charset="-120"/>
               </a:rPr>
-              <a:t>+52% completion lift</a:t>
-            </a:r>
-            <a:endParaRPr lang="en-US" sz="1200" dirty="0"/>
+              <a:t>Mid-funnel context-aware</a:t>
+            </a:r>
+            <a:endParaRPr lang="en-US" sz="1100" dirty="0"/>
           </a:p>
         </p:txBody>
       </p:sp>
@@ -3728,8 +3728,8 @@
         </p:nvSpPr>
         <p:spPr>
           <a:xfrm>
-            <a:off x="9372600" y="5897880"/>
-            <a:ext cx="2103120" cy="292608"/>
+            <a:off x="2676906" y="5989320"/>
+            <a:ext cx="1298448" cy="274320"/>
           </a:xfrm>
           <a:prstGeom prst="rect">
             <a:avLst/>
@@ -3745,7 +3745,7 @@
               <a:buNone/>
             </a:pPr>
             <a:r>
-              <a:rPr lang="en-US" sz="1100" i="1" dirty="0">
+              <a:rPr lang="en-US" sz="1000" i="1" dirty="0">
                 <a:solidFill>
                   <a:srgbClr val="CBD5E1"/>
                 </a:solidFill>
@@ -3755,13 +3755,487 @@
               </a:rPr>
               <a:t>→ Onboarding pain</a:t>
             </a:r>
+            <a:endParaRPr lang="en-US" sz="1000" dirty="0"/>
+          </a:p>
+        </p:txBody>
+      </p:sp>
+      <p:sp>
+        <p:nvSpPr>
+          <p:cNvPr id="32" name="Shape 26"/>
+          <p:cNvSpPr/>
+          <p:nvPr/>
+        </p:nvSpPr>
+        <p:spPr>
+          <a:xfrm>
+            <a:off x="4297680" y="4114800"/>
+            <a:ext cx="3703320" cy="2240280"/>
+          </a:xfrm>
+          <a:prstGeom prst="rect">
+            <a:avLst/>
+          </a:prstGeom>
+          <a:solidFill>
+            <a:srgbClr val="13182B"/>
+          </a:solidFill>
+          <a:ln w="12700">
+            <a:solidFill>
+              <a:srgbClr val="334155"/>
+            </a:solidFill>
+            <a:prstDash val="solid"/>
+          </a:ln>
+          <a:effectLst>
+            <a:outerShdw sx="100000" sy="100000" kx="0" ky="0" algn="bl" rotWithShape="0" blurRad="152400" dist="38100" dir="5400000">
+              <a:srgbClr val="000000">
+                <a:alpha val="35000"/>
+              </a:srgbClr>
+            </a:outerShdw>
+          </a:effectLst>
+        </p:spPr>
+      </p:sp>
+      <p:sp>
+        <p:nvSpPr>
+          <p:cNvPr id="33" name="Shape 27"/>
+          <p:cNvSpPr/>
+          <p:nvPr/>
+        </p:nvSpPr>
+        <p:spPr>
+          <a:xfrm>
+            <a:off x="4297680" y="4114800"/>
+            <a:ext cx="64008" cy="2240280"/>
+          </a:xfrm>
+          <a:prstGeom prst="rect">
+            <a:avLst/>
+          </a:prstGeom>
+          <a:solidFill>
+            <a:srgbClr val="7C3AED"/>
+          </a:solidFill>
+          <a:ln w="12700">
+            <a:solidFill>
+              <a:srgbClr val="7C3AED"/>
+            </a:solidFill>
+            <a:prstDash val="solid"/>
+          </a:ln>
+        </p:spPr>
+      </p:sp>
+      <p:pic>
+        <p:nvPicPr>
+          <p:cNvPr id="34" name="Image 4" descr="preencoded.png">    </p:cNvPr>
+          <p:cNvPicPr>
+            <a:picLocks noChangeAspect="1"/>
+          </p:cNvPicPr>
+          <p:nvPr/>
+        </p:nvPicPr>
+        <p:blipFill>
+          <a:blip r:embed="rId5"/>
+          <a:stretch>
+            <a:fillRect/>
+          </a:stretch>
+        </p:blipFill>
+        <p:spPr>
+          <a:xfrm>
+            <a:off x="4526280" y="4343400"/>
+            <a:ext cx="384048" cy="384048"/>
+          </a:xfrm>
+          <a:prstGeom prst="rect">
+            <a:avLst/>
+          </a:prstGeom>
+        </p:spPr>
+      </p:pic>
+      <p:sp>
+        <p:nvSpPr>
+          <p:cNvPr id="35" name="Text 28"/>
+          <p:cNvSpPr/>
+          <p:nvPr/>
+        </p:nvSpPr>
+        <p:spPr>
+          <a:xfrm>
+            <a:off x="5074920" y="4279392"/>
+            <a:ext cx="2834640" cy="548640"/>
+          </a:xfrm>
+          <a:prstGeom prst="rect">
+            <a:avLst/>
+          </a:prstGeom>
+          <a:noFill/>
+          <a:ln/>
+        </p:spPr>
+        <p:txBody>
+          <a:bodyPr wrap="square" lIns="0" tIns="0" rIns="0" bIns="0" rtlCol="0" anchor="ctr"/>
+          <a:lstStyle/>
+          <a:p>
+            <a:pPr indent="0" marL="0">
+              <a:buNone/>
+            </a:pPr>
+            <a:r>
+              <a:rPr lang="en-US" sz="1400" b="1" dirty="0">
+                <a:solidFill>
+                  <a:srgbClr val="F1F5F9"/>
+                </a:solidFill>
+                <a:latin typeface="Arial" pitchFamily="34" charset="0"/>
+                <a:ea typeface="Arial" pitchFamily="34" charset="-122"/>
+                <a:cs typeface="Arial" pitchFamily="34" charset="-120"/>
+              </a:rPr>
+              <a:t>Synthetic events from event patterns</a:t>
+            </a:r>
+            <a:endParaRPr lang="en-US" sz="1400" dirty="0"/>
+          </a:p>
+        </p:txBody>
+      </p:sp>
+      <p:sp>
+        <p:nvSpPr>
+          <p:cNvPr id="36" name="Text 29"/>
+          <p:cNvSpPr/>
+          <p:nvPr/>
+        </p:nvSpPr>
+        <p:spPr>
+          <a:xfrm>
+            <a:off x="4526280" y="4892040"/>
+            <a:ext cx="3337560" cy="1051560"/>
+          </a:xfrm>
+          <a:prstGeom prst="rect">
+            <a:avLst/>
+          </a:prstGeom>
+          <a:noFill/>
+          <a:ln/>
+        </p:spPr>
+        <p:txBody>
+          <a:bodyPr wrap="square" lIns="0" tIns="0" rIns="0" bIns="0" rtlCol="0" anchor="ctr"/>
+          <a:lstStyle/>
+          <a:p>
+            <a:pPr indent="0" marL="0">
+              <a:buNone/>
+            </a:pPr>
+            <a:r>
+              <a:rPr lang="en-US" sz="1100" dirty="0">
+                <a:solidFill>
+                  <a:srgbClr val="CBD5E1"/>
+                </a:solidFill>
+                <a:latin typeface="Arial" pitchFamily="34" charset="0"/>
+                <a:ea typeface="Arial" pitchFamily="34" charset="-122"/>
+                <a:cs typeface="Arial" pitchFamily="34" charset="-120"/>
+              </a:rPr>
+              <a:t>Emit a new derived event when a pattern matches — e.g., "high_intent_session" when 3 listings + a filter + 8s idle. Feeds back into the same SDK / warehouse.</a:t>
+            </a:r>
             <a:endParaRPr lang="en-US" sz="1100" dirty="0"/>
           </a:p>
         </p:txBody>
       </p:sp>
       <p:sp>
         <p:nvSpPr>
-          <p:cNvPr id="32" name="Shape 26"/>
+          <p:cNvPr id="37" name="Text 30"/>
+          <p:cNvSpPr/>
+          <p:nvPr/>
+        </p:nvSpPr>
+        <p:spPr>
+          <a:xfrm>
+            <a:off x="4526280" y="5989320"/>
+            <a:ext cx="2036826" cy="274320"/>
+          </a:xfrm>
+          <a:prstGeom prst="rect">
+            <a:avLst/>
+          </a:prstGeom>
+          <a:noFill/>
+          <a:ln/>
+        </p:spPr>
+        <p:txBody>
+          <a:bodyPr wrap="square" lIns="0" tIns="0" rIns="0" bIns="0" rtlCol="0" anchor="ctr"/>
+          <a:lstStyle/>
+          <a:p>
+            <a:pPr indent="0" marL="0">
+              <a:buNone/>
+            </a:pPr>
+            <a:r>
+              <a:rPr lang="en-US" sz="1100" b="1" dirty="0">
+                <a:solidFill>
+                  <a:srgbClr val="7C3AED"/>
+                </a:solidFill>
+                <a:latin typeface="Arial" pitchFamily="34" charset="0"/>
+                <a:ea typeface="Arial" pitchFamily="34" charset="-122"/>
+                <a:cs typeface="Arial" pitchFamily="34" charset="-120"/>
+              </a:rPr>
+              <a:t>Custom hooks on patterns</a:t>
+            </a:r>
+            <a:endParaRPr lang="en-US" sz="1100" dirty="0"/>
+          </a:p>
+        </p:txBody>
+      </p:sp>
+      <p:sp>
+        <p:nvSpPr>
+          <p:cNvPr id="38" name="Text 31"/>
+          <p:cNvSpPr/>
+          <p:nvPr/>
+        </p:nvSpPr>
+        <p:spPr>
+          <a:xfrm>
+            <a:off x="6471666" y="5989320"/>
+            <a:ext cx="1298448" cy="274320"/>
+          </a:xfrm>
+          <a:prstGeom prst="rect">
+            <a:avLst/>
+          </a:prstGeom>
+          <a:noFill/>
+          <a:ln/>
+        </p:spPr>
+        <p:txBody>
+          <a:bodyPr wrap="square" lIns="0" tIns="0" rIns="0" bIns="0" rtlCol="0" anchor="ctr"/>
+          <a:lstStyle/>
+          <a:p>
+            <a:pPr algn="r" indent="0" marL="0">
+              <a:buNone/>
+            </a:pPr>
+            <a:r>
+              <a:rPr lang="en-US" sz="1000" i="1" dirty="0">
+                <a:solidFill>
+                  <a:srgbClr val="CBD5E1"/>
+                </a:solidFill>
+                <a:latin typeface="Arial" pitchFamily="34" charset="0"/>
+                <a:ea typeface="Arial" pitchFamily="34" charset="-122"/>
+                <a:cs typeface="Arial" pitchFamily="34" charset="-120"/>
+              </a:rPr>
+              <a:t>→ Platform extensibility</a:t>
+            </a:r>
+            <a:endParaRPr lang="en-US" sz="1000" dirty="0"/>
+          </a:p>
+        </p:txBody>
+      </p:sp>
+      <p:sp>
+        <p:nvSpPr>
+          <p:cNvPr id="39" name="Shape 32"/>
+          <p:cNvSpPr/>
+          <p:nvPr/>
+        </p:nvSpPr>
+        <p:spPr>
+          <a:xfrm>
+            <a:off x="8092440" y="4114800"/>
+            <a:ext cx="3703320" cy="2240280"/>
+          </a:xfrm>
+          <a:prstGeom prst="rect">
+            <a:avLst/>
+          </a:prstGeom>
+          <a:solidFill>
+            <a:srgbClr val="13182B"/>
+          </a:solidFill>
+          <a:ln w="12700">
+            <a:solidFill>
+              <a:srgbClr val="334155"/>
+            </a:solidFill>
+            <a:prstDash val="solid"/>
+          </a:ln>
+          <a:effectLst>
+            <a:outerShdw sx="100000" sy="100000" kx="0" ky="0" algn="bl" rotWithShape="0" blurRad="152400" dist="38100" dir="5400000">
+              <a:srgbClr val="000000">
+                <a:alpha val="35000"/>
+              </a:srgbClr>
+            </a:outerShdw>
+          </a:effectLst>
+        </p:spPr>
+      </p:sp>
+      <p:sp>
+        <p:nvSpPr>
+          <p:cNvPr id="40" name="Shape 33"/>
+          <p:cNvSpPr/>
+          <p:nvPr/>
+        </p:nvSpPr>
+        <p:spPr>
+          <a:xfrm>
+            <a:off x="8092440" y="4114800"/>
+            <a:ext cx="64008" cy="2240280"/>
+          </a:xfrm>
+          <a:prstGeom prst="rect">
+            <a:avLst/>
+          </a:prstGeom>
+          <a:solidFill>
+            <a:srgbClr val="60A5FA"/>
+          </a:solidFill>
+          <a:ln w="12700">
+            <a:solidFill>
+              <a:srgbClr val="60A5FA"/>
+            </a:solidFill>
+            <a:prstDash val="solid"/>
+          </a:ln>
+        </p:spPr>
+      </p:sp>
+      <p:pic>
+        <p:nvPicPr>
+          <p:cNvPr id="41" name="Image 5" descr="preencoded.png">    </p:cNvPr>
+          <p:cNvPicPr>
+            <a:picLocks noChangeAspect="1"/>
+          </p:cNvPicPr>
+          <p:nvPr/>
+        </p:nvPicPr>
+        <p:blipFill>
+          <a:blip r:embed="rId6"/>
+          <a:stretch>
+            <a:fillRect/>
+          </a:stretch>
+        </p:blipFill>
+        <p:spPr>
+          <a:xfrm>
+            <a:off x="8321040" y="4343400"/>
+            <a:ext cx="384048" cy="384048"/>
+          </a:xfrm>
+          <a:prstGeom prst="rect">
+            <a:avLst/>
+          </a:prstGeom>
+        </p:spPr>
+      </p:pic>
+      <p:sp>
+        <p:nvSpPr>
+          <p:cNvPr id="42" name="Text 34"/>
+          <p:cNvSpPr/>
+          <p:nvPr/>
+        </p:nvSpPr>
+        <p:spPr>
+          <a:xfrm>
+            <a:off x="8869680" y="4279392"/>
+            <a:ext cx="2834640" cy="548640"/>
+          </a:xfrm>
+          <a:prstGeom prst="rect">
+            <a:avLst/>
+          </a:prstGeom>
+          <a:noFill/>
+          <a:ln/>
+        </p:spPr>
+        <p:txBody>
+          <a:bodyPr wrap="square" lIns="0" tIns="0" rIns="0" bIns="0" rtlCol="0" anchor="ctr"/>
+          <a:lstStyle/>
+          <a:p>
+            <a:pPr indent="0" marL="0">
+              <a:buNone/>
+            </a:pPr>
+            <a:r>
+              <a:rPr lang="en-US" sz="1400" b="1" dirty="0">
+                <a:solidFill>
+                  <a:srgbClr val="F1F5F9"/>
+                </a:solidFill>
+                <a:latin typeface="Arial" pitchFamily="34" charset="0"/>
+                <a:ea typeface="Arial" pitchFamily="34" charset="-122"/>
+                <a:cs typeface="Arial" pitchFamily="34" charset="-120"/>
+              </a:rPr>
+              <a:t>Temporal context API</a:t>
+            </a:r>
+            <a:endParaRPr lang="en-US" sz="1400" dirty="0"/>
+          </a:p>
+        </p:txBody>
+      </p:sp>
+      <p:sp>
+        <p:nvSpPr>
+          <p:cNvPr id="43" name="Text 35"/>
+          <p:cNvSpPr/>
+          <p:nvPr/>
+        </p:nvSpPr>
+        <p:spPr>
+          <a:xfrm>
+            <a:off x="8321040" y="4892040"/>
+            <a:ext cx="3337560" cy="1051560"/>
+          </a:xfrm>
+          <a:prstGeom prst="rect">
+            <a:avLst/>
+          </a:prstGeom>
+          <a:noFill/>
+          <a:ln/>
+        </p:spPr>
+        <p:txBody>
+          <a:bodyPr wrap="square" lIns="0" tIns="0" rIns="0" bIns="0" rtlCol="0" anchor="ctr"/>
+          <a:lstStyle/>
+          <a:p>
+            <a:pPr indent="0" marL="0">
+              <a:buNone/>
+            </a:pPr>
+            <a:r>
+              <a:rPr lang="en-US" sz="1100" dirty="0">
+                <a:solidFill>
+                  <a:srgbClr val="CBD5E1"/>
+                </a:solidFill>
+                <a:latin typeface="Arial" pitchFamily="34" charset="0"/>
+                <a:ea typeface="Arial" pitchFamily="34" charset="-122"/>
+                <a:cs typeface="Arial" pitchFamily="34" charset="-120"/>
+              </a:rPr>
+              <a:t>Ask "what did this user do in the last 10 minutes?" — short-term memory exposed as a query, so agents and apps can reason over live behavior, not yesterday's batch.</a:t>
+            </a:r>
+            <a:endParaRPr lang="en-US" sz="1100" dirty="0"/>
+          </a:p>
+        </p:txBody>
+      </p:sp>
+      <p:sp>
+        <p:nvSpPr>
+          <p:cNvPr id="44" name="Text 36"/>
+          <p:cNvSpPr/>
+          <p:nvPr/>
+        </p:nvSpPr>
+        <p:spPr>
+          <a:xfrm>
+            <a:off x="8321040" y="5989320"/>
+            <a:ext cx="2036826" cy="274320"/>
+          </a:xfrm>
+          <a:prstGeom prst="rect">
+            <a:avLst/>
+          </a:prstGeom>
+          <a:noFill/>
+          <a:ln/>
+        </p:spPr>
+        <p:txBody>
+          <a:bodyPr wrap="square" lIns="0" tIns="0" rIns="0" bIns="0" rtlCol="0" anchor="ctr"/>
+          <a:lstStyle/>
+          <a:p>
+            <a:pPr indent="0" marL="0">
+              <a:buNone/>
+            </a:pPr>
+            <a:r>
+              <a:rPr lang="en-US" sz="1100" b="1" dirty="0">
+                <a:solidFill>
+                  <a:srgbClr val="60A5FA"/>
+                </a:solidFill>
+                <a:latin typeface="Arial" pitchFamily="34" charset="0"/>
+                <a:ea typeface="Arial" pitchFamily="34" charset="-122"/>
+                <a:cs typeface="Arial" pitchFamily="34" charset="-120"/>
+              </a:rPr>
+              <a:t>Live session lookup</a:t>
+            </a:r>
+            <a:endParaRPr lang="en-US" sz="1100" dirty="0"/>
+          </a:p>
+        </p:txBody>
+      </p:sp>
+      <p:sp>
+        <p:nvSpPr>
+          <p:cNvPr id="45" name="Text 37"/>
+          <p:cNvSpPr/>
+          <p:nvPr/>
+        </p:nvSpPr>
+        <p:spPr>
+          <a:xfrm>
+            <a:off x="10266426" y="5989320"/>
+            <a:ext cx="1298448" cy="274320"/>
+          </a:xfrm>
+          <a:prstGeom prst="rect">
+            <a:avLst/>
+          </a:prstGeom>
+          <a:noFill/>
+          <a:ln/>
+        </p:spPr>
+        <p:txBody>
+          <a:bodyPr wrap="square" lIns="0" tIns="0" rIns="0" bIns="0" rtlCol="0" anchor="ctr"/>
+          <a:lstStyle/>
+          <a:p>
+            <a:pPr algn="r" indent="0" marL="0">
+              <a:buNone/>
+            </a:pPr>
+            <a:r>
+              <a:rPr lang="en-US" sz="1000" i="1" dirty="0">
+                <a:solidFill>
+                  <a:srgbClr val="CBD5E1"/>
+                </a:solidFill>
+                <a:latin typeface="Arial" pitchFamily="34" charset="0"/>
+                <a:ea typeface="Arial" pitchFamily="34" charset="-122"/>
+                <a:cs typeface="Arial" pitchFamily="34" charset="-120"/>
+              </a:rPr>
+              <a:t>→ Agent / app context</a:t>
+            </a:r>
+            <a:endParaRPr lang="en-US" sz="1000" dirty="0"/>
+          </a:p>
+        </p:txBody>
+      </p:sp>
+      <p:sp>
+        <p:nvSpPr>
+          <p:cNvPr id="46" name="Shape 38"/>
           <p:cNvSpPr/>
           <p:nvPr/>
         </p:nvSpPr>
@@ -3786,7 +4260,7 @@
       </p:sp>
       <p:sp>
         <p:nvSpPr>
-          <p:cNvPr id="33" name="Text 27"/>
+          <p:cNvPr id="47" name="Text 39"/>
           <p:cNvSpPr/>
           <p:nvPr/>
         </p:nvSpPr>
